--- a/MECH191_metallurgy/slideDecks/pptx/MECH191_Week1_Lecture.pptx
+++ b/MECH191_metallurgy/slideDecks/pptx/MECH191_Week1_Lecture.pptx
@@ -8589,7 +8589,7 @@
         </p:spPr>
         <p:txBody>
           <a:bodyPr wrap="none" lIns="0" rIns="0" tIns="0" bIns="0">
-            <a:spAutoFit/>
+            <a:noAutofit/>
           </a:bodyPr>
           <a:lstStyle/>
           <a:p>
@@ -8600,7 +8600,7 @@
                 </a:solidFill>
                 <a:latin typeface="Calibri"/>
               </a:rPr>
-              <a:t>Metallography Lab — Module 1</a:t>
+              <a:t>Alloy Research Portfolio — Module 1</a:t>
             </a:r>
           </a:p>
         </p:txBody>
@@ -8623,7 +8623,7 @@
         </p:spPr>
         <p:txBody>
           <a:bodyPr wrap="none" lIns="0" rIns="0" tIns="0" bIns="0">
-            <a:spAutoFit/>
+            <a:noAutofit/>
           </a:bodyPr>
           <a:lstStyle/>
           <a:p>
@@ -8634,7 +8634,7 @@
                 </a:solidFill>
                 <a:latin typeface="Calibri"/>
               </a:rPr>
-              <a:t>EXAMET-5-R-600-HD  ·  50–500×</a:t>
+              <a:t>No Microscope Required</a:t>
             </a:r>
           </a:p>
         </p:txBody>
@@ -8759,7 +8759,7 @@
         </p:spPr>
         <p:txBody>
           <a:bodyPr wrap="none" lIns="0" rIns="0" tIns="0" bIns="0">
-            <a:spAutoFit/>
+            <a:noAutofit/>
           </a:bodyPr>
           <a:lstStyle/>
           <a:p>
@@ -8770,7 +8770,7 @@
                 </a:solidFill>
                 <a:latin typeface="Calibri"/>
               </a:rPr>
-              <a:t>Observe grain boundaries at 100×. Sketch the grain network and </a:t>
+              <a:t>Research 1018 low-carbon steel (normalized): composition, mechanical</a:t>
             </a:r>
           </a:p>
         </p:txBody>
@@ -8793,7 +8793,7 @@
         </p:spPr>
         <p:txBody>
           <a:bodyPr wrap="none" lIns="0" rIns="0" tIns="0" bIns="0">
-            <a:spAutoFit/>
+            <a:noAutofit/>
           </a:bodyPr>
           <a:lstStyle/>
           <a:p>
@@ -8804,7 +8804,7 @@
                 </a:solidFill>
                 <a:latin typeface="Calibri"/>
               </a:rPr>
-              <a:t>estimate average grain diameter.</a:t>
+              <a:t>properties, and how normalizing produces its grain structure.</a:t>
             </a:r>
           </a:p>
         </p:txBody>
@@ -8861,7 +8861,7 @@
         </p:spPr>
         <p:txBody>
           <a:bodyPr wrap="none" lIns="0" rIns="0" tIns="0" bIns="0">
-            <a:spAutoFit/>
+            <a:noAutofit/>
           </a:bodyPr>
           <a:lstStyle/>
           <a:p>
@@ -8872,7 +8872,7 @@
                 </a:solidFill>
                 <a:latin typeface="Calibri"/>
               </a:rPr>
-              <a:t>1  Observe — complete feature table</a:t>
+              <a:t>1  Research — record data &amp; sources</a:t>
             </a:r>
           </a:p>
         </p:txBody>
@@ -8895,7 +8895,7 @@
         </p:spPr>
         <p:txBody>
           <a:bodyPr wrap="none" lIns="0" rIns="0" tIns="0" bIns="0">
-            <a:spAutoFit/>
+            <a:noAutofit/>
           </a:bodyPr>
           <a:lstStyle/>
           <a:p>
@@ -8906,7 +8906,7 @@
                 </a:solidFill>
                 <a:latin typeface="Calibri"/>
               </a:rPr>
-              <a:t>2  Sketch — label magnification &amp; specimen</a:t>
+              <a:t>2  Answer — short-answer questions</a:t>
             </a:r>
           </a:p>
         </p:txBody>
@@ -8929,7 +8929,7 @@
         </p:spPr>
         <p:txBody>
           <a:bodyPr wrap="none" lIns="0" rIns="0" tIns="0" bIns="0">
-            <a:spAutoFit/>
+            <a:noAutofit/>
           </a:bodyPr>
           <a:lstStyle/>
           <a:p>
@@ -8940,7 +8940,7 @@
                 </a:solidFill>
                 <a:latin typeface="Calibri"/>
               </a:rPr>
-              <a:t>3  Answer — 4 short questions</a:t>
+              <a:t>3  Apply — critical-thinking &amp; equations</a:t>
             </a:r>
           </a:p>
         </p:txBody>
@@ -8963,7 +8963,7 @@
         </p:spPr>
         <p:txBody>
           <a:bodyPr wrap="none" lIns="0" rIns="0" tIns="0" bIns="0">
-            <a:spAutoFit/>
+            <a:noAutofit/>
           </a:bodyPr>
           <a:lstStyle/>
           <a:p>
@@ -8974,7 +8974,7 @@
                 </a:solidFill>
                 <a:latin typeface="Calibri"/>
               </a:rPr>
-              <a:t>Specimens to Check Out</a:t>
+              <a:t>Alloys of Record</a:t>
             </a:r>
           </a:p>
         </p:txBody>
@@ -8997,7 +8997,7 @@
         </p:spPr>
         <p:txBody>
           <a:bodyPr wrap="none" lIns="0" rIns="0" tIns="0" bIns="0">
-            <a:spAutoFit/>
+            <a:noAutofit/>
           </a:bodyPr>
           <a:lstStyle/>
           <a:p>
@@ -9008,7 +9008,7 @@
                 </a:solidFill>
                 <a:latin typeface="Calibri"/>
               </a:rPr>
-              <a:t>· Specimen A — 1018 low-carbon steel</a:t>
+              <a:t>· Alloy A — 1018 low-carbon steel (normalized)</a:t>
             </a:r>
           </a:p>
         </p:txBody>
@@ -9031,7 +9031,7 @@
         </p:spPr>
         <p:txBody>
           <a:bodyPr wrap="none" lIns="0" rIns="0" tIns="0" bIns="0">
-            <a:spAutoFit/>
+            <a:noAutofit/>
           </a:bodyPr>
           <a:lstStyle/>
           <a:p>
@@ -9042,7 +9042,7 @@
                 </a:solidFill>
                 <a:latin typeface="Calibri"/>
               </a:rPr>
-              <a:t>How to check out the kit:</a:t>
+              <a:t>How to Complete This Module:</a:t>
             </a:r>
           </a:p>
         </p:txBody>
@@ -9065,7 +9065,7 @@
         </p:spPr>
         <p:txBody>
           <a:bodyPr wrap="none" lIns="0" rIns="0" tIns="0" bIns="0">
-            <a:spAutoFit/>
+            <a:noAutofit/>
           </a:bodyPr>
           <a:lstStyle/>
           <a:p>
@@ -9076,7 +9076,7 @@
                 </a:solidFill>
                 <a:latin typeface="Calibri"/>
               </a:rPr>
-              <a:t>1  See instructor after class today</a:t>
+              <a:t>1  Research the alloy(s) using credible sources</a:t>
             </a:r>
           </a:p>
         </p:txBody>
@@ -9099,7 +9099,7 @@
         </p:spPr>
         <p:txBody>
           <a:bodyPr wrap="none" lIns="0" rIns="0" tIns="0" bIns="0">
-            <a:spAutoFit/>
+            <a:noAutofit/>
           </a:bodyPr>
           <a:lstStyle/>
           <a:p>
@@ -9110,7 +9110,7 @@
                 </a:solidFill>
                 <a:latin typeface="Calibri"/>
               </a:rPr>
-              <a:t>2  Sign out the specimen tray</a:t>
+              <a:t>2  Record data with a source citation</a:t>
             </a:r>
           </a:p>
         </p:txBody>
@@ -9133,7 +9133,7 @@
         </p:spPr>
         <p:txBody>
           <a:bodyPr wrap="none" lIns="0" rIns="0" tIns="0" bIns="0">
-            <a:spAutoFit/>
+            <a:noAutofit/>
           </a:bodyPr>
           <a:lstStyle/>
           <a:p>
@@ -9144,7 +9144,7 @@
                 </a:solidFill>
                 <a:latin typeface="Calibri"/>
               </a:rPr>
-              <a:t>3  Use the EXAMET-5 at your convenience</a:t>
+              <a:t>3  Answer the short-answer questions</a:t>
             </a:r>
           </a:p>
         </p:txBody>
@@ -9167,7 +9167,7 @@
         </p:spPr>
         <p:txBody>
           <a:bodyPr wrap="none" lIns="0" rIns="0" tIns="0" bIns="0">
-            <a:spAutoFit/>
+            <a:noAutofit/>
           </a:bodyPr>
           <a:lstStyle/>
           <a:p>
@@ -9178,7 +9178,7 @@
                 </a:solidFill>
                 <a:latin typeface="Calibri"/>
               </a:rPr>
-              <a:t>4  Return kit before leaving class</a:t>
+              <a:t>4  Answer the critical-thinking questions</a:t>
             </a:r>
           </a:p>
         </p:txBody>
@@ -9201,7 +9201,7 @@
         </p:spPr>
         <p:txBody>
           <a:bodyPr wrap="none" lIns="0" rIns="0" tIns="0" bIns="0">
-            <a:spAutoFit/>
+            <a:noAutofit/>
           </a:bodyPr>
           <a:lstStyle/>
           <a:p>
@@ -9212,7 +9212,7 @@
                 </a:solidFill>
                 <a:latin typeface="Calibri"/>
               </a:rPr>
-              <a:t>5  Submit completed module with your portfolio</a:t>
+              <a:t>5  Keep the module with your portfolio</a:t>
             </a:r>
           </a:p>
         </p:txBody>

--- a/MECH191_metallurgy/slideDecks/pptx/MECH191_Week1_Lecture.pptx
+++ b/MECH191_metallurgy/slideDecks/pptx/MECH191_Week1_Lecture.pptx
@@ -6762,7 +6762,7 @@
                 </a:solidFill>
                 <a:latin typeface="Calibri"/>
               </a:rPr>
-              <a:t>Unit 1 covers Weeks 1 – 2  ·  Review atomic bonding and crystal structures before Week 2es</a:t>
+              <a:t>Unit 1 covers Weeks 1 – 2  ·  Review atomic bonding and crystal structures before Week 2</a:t>
             </a:r>
           </a:p>
         </p:txBody>
